--- a/cpp/latex/lec4/report_2412747_4.pptx
+++ b/cpp/latex/lec4/report_2412747_4.pptx
@@ -263,7 +263,7 @@
           <a:p>
             <a:fld id="{B1E0A600-24EE-DB41-BF3A-0071F0FC24AE}" type="datetimeFigureOut">
               <a:rPr kumimoji="1" lang="ja-JP" altLang="en-US" smtClean="0"/>
-              <a:t>2026/5/19</a:t>
+              <a:t>2026/5/22</a:t>
             </a:fld>
             <a:endParaRPr kumimoji="1" lang="ja-JP" altLang="en-US"/>
           </a:p>
@@ -493,7 +493,7 @@
           <a:p>
             <a:fld id="{B1E0A600-24EE-DB41-BF3A-0071F0FC24AE}" type="datetimeFigureOut">
               <a:rPr kumimoji="1" lang="ja-JP" altLang="en-US" smtClean="0"/>
-              <a:t>2026/5/19</a:t>
+              <a:t>2026/5/22</a:t>
             </a:fld>
             <a:endParaRPr kumimoji="1" lang="ja-JP" altLang="en-US"/>
           </a:p>
@@ -733,7 +733,7 @@
           <a:p>
             <a:fld id="{B1E0A600-24EE-DB41-BF3A-0071F0FC24AE}" type="datetimeFigureOut">
               <a:rPr kumimoji="1" lang="ja-JP" altLang="en-US" smtClean="0"/>
-              <a:t>2026/5/19</a:t>
+              <a:t>2026/5/22</a:t>
             </a:fld>
             <a:endParaRPr kumimoji="1" lang="ja-JP" altLang="en-US"/>
           </a:p>
@@ -963,7 +963,7 @@
           <a:p>
             <a:fld id="{B1E0A600-24EE-DB41-BF3A-0071F0FC24AE}" type="datetimeFigureOut">
               <a:rPr kumimoji="1" lang="ja-JP" altLang="en-US" smtClean="0"/>
-              <a:t>2026/5/19</a:t>
+              <a:t>2026/5/22</a:t>
             </a:fld>
             <a:endParaRPr kumimoji="1" lang="ja-JP" altLang="en-US"/>
           </a:p>
@@ -1238,7 +1238,7 @@
           <a:p>
             <a:fld id="{B1E0A600-24EE-DB41-BF3A-0071F0FC24AE}" type="datetimeFigureOut">
               <a:rPr kumimoji="1" lang="ja-JP" altLang="en-US" smtClean="0"/>
-              <a:t>2026/5/19</a:t>
+              <a:t>2026/5/22</a:t>
             </a:fld>
             <a:endParaRPr kumimoji="1" lang="ja-JP" altLang="en-US"/>
           </a:p>
@@ -1567,7 +1567,7 @@
           <a:p>
             <a:fld id="{B1E0A600-24EE-DB41-BF3A-0071F0FC24AE}" type="datetimeFigureOut">
               <a:rPr kumimoji="1" lang="ja-JP" altLang="en-US" smtClean="0"/>
-              <a:t>2026/5/19</a:t>
+              <a:t>2026/5/22</a:t>
             </a:fld>
             <a:endParaRPr kumimoji="1" lang="ja-JP" altLang="en-US"/>
           </a:p>
@@ -2043,7 +2043,7 @@
           <a:p>
             <a:fld id="{B1E0A600-24EE-DB41-BF3A-0071F0FC24AE}" type="datetimeFigureOut">
               <a:rPr kumimoji="1" lang="ja-JP" altLang="en-US" smtClean="0"/>
-              <a:t>2026/5/19</a:t>
+              <a:t>2026/5/22</a:t>
             </a:fld>
             <a:endParaRPr kumimoji="1" lang="ja-JP" altLang="en-US"/>
           </a:p>
@@ -2184,7 +2184,7 @@
           <a:p>
             <a:fld id="{B1E0A600-24EE-DB41-BF3A-0071F0FC24AE}" type="datetimeFigureOut">
               <a:rPr kumimoji="1" lang="ja-JP" altLang="en-US" smtClean="0"/>
-              <a:t>2026/5/19</a:t>
+              <a:t>2026/5/22</a:t>
             </a:fld>
             <a:endParaRPr kumimoji="1" lang="ja-JP" altLang="en-US"/>
           </a:p>
@@ -2297,7 +2297,7 @@
           <a:p>
             <a:fld id="{B1E0A600-24EE-DB41-BF3A-0071F0FC24AE}" type="datetimeFigureOut">
               <a:rPr kumimoji="1" lang="ja-JP" altLang="en-US" smtClean="0"/>
-              <a:t>2026/5/19</a:t>
+              <a:t>2026/5/22</a:t>
             </a:fld>
             <a:endParaRPr kumimoji="1" lang="ja-JP" altLang="en-US"/>
           </a:p>
@@ -2640,7 +2640,7 @@
           <a:p>
             <a:fld id="{B1E0A600-24EE-DB41-BF3A-0071F0FC24AE}" type="datetimeFigureOut">
               <a:rPr kumimoji="1" lang="ja-JP" altLang="en-US" smtClean="0"/>
-              <a:t>2026/5/19</a:t>
+              <a:t>2026/5/22</a:t>
             </a:fld>
             <a:endParaRPr kumimoji="1" lang="ja-JP" altLang="en-US"/>
           </a:p>
@@ -2928,7 +2928,7 @@
           <a:p>
             <a:fld id="{B1E0A600-24EE-DB41-BF3A-0071F0FC24AE}" type="datetimeFigureOut">
               <a:rPr kumimoji="1" lang="ja-JP" altLang="en-US" smtClean="0"/>
-              <a:t>2026/5/19</a:t>
+              <a:t>2026/5/22</a:t>
             </a:fld>
             <a:endParaRPr kumimoji="1" lang="ja-JP" altLang="en-US"/>
           </a:p>
@@ -3201,7 +3201,7 @@
           <a:p>
             <a:fld id="{B1E0A600-24EE-DB41-BF3A-0071F0FC24AE}" type="datetimeFigureOut">
               <a:rPr kumimoji="1" lang="ja-JP" altLang="en-US" smtClean="0"/>
-              <a:t>2026/5/19</a:t>
+              <a:t>2026/5/22</a:t>
             </a:fld>
             <a:endParaRPr kumimoji="1" lang="ja-JP" altLang="en-US"/>
           </a:p>
@@ -3669,6 +3669,36 @@
           </a:p>
         </p:txBody>
       </p:sp>
+      <p:pic>
+        <p:nvPicPr>
+          <p:cNvPr id="3" name="図 2">
+            <a:extLst>
+              <a:ext uri="{FF2B5EF4-FFF2-40B4-BE49-F238E27FC236}">
+                <a16:creationId xmlns:a16="http://schemas.microsoft.com/office/drawing/2014/main" id="{CC58C3E6-C26F-1161-3ACE-74B690D4FCF8}"/>
+              </a:ext>
+            </a:extLst>
+          </p:cNvPr>
+          <p:cNvPicPr>
+            <a:picLocks noChangeAspect="1"/>
+          </p:cNvPicPr>
+          <p:nvPr/>
+        </p:nvPicPr>
+        <p:blipFill>
+          <a:blip r:embed="rId2"/>
+          <a:stretch>
+            <a:fillRect/>
+          </a:stretch>
+        </p:blipFill>
+        <p:spPr>
+          <a:xfrm>
+            <a:off x="2924175" y="927100"/>
+            <a:ext cx="6343650" cy="3752850"/>
+          </a:xfrm>
+          <a:prstGeom prst="rect">
+            <a:avLst/>
+          </a:prstGeom>
+        </p:spPr>
+      </p:pic>
     </p:spTree>
     <p:extLst>
       <p:ext uri="{BB962C8B-B14F-4D97-AF65-F5344CB8AC3E}">
@@ -3861,6 +3891,36 @@
           </a:p>
         </p:txBody>
       </p:sp>
+      <p:pic>
+        <p:nvPicPr>
+          <p:cNvPr id="4" name="図 3">
+            <a:extLst>
+              <a:ext uri="{FF2B5EF4-FFF2-40B4-BE49-F238E27FC236}">
+                <a16:creationId xmlns:a16="http://schemas.microsoft.com/office/drawing/2014/main" id="{D68F47C0-3B2B-C6EA-61E9-D57432FB5302}"/>
+              </a:ext>
+            </a:extLst>
+          </p:cNvPr>
+          <p:cNvPicPr>
+            <a:picLocks noChangeAspect="1"/>
+          </p:cNvPicPr>
+          <p:nvPr/>
+        </p:nvPicPr>
+        <p:blipFill>
+          <a:blip r:embed="rId2"/>
+          <a:stretch>
+            <a:fillRect/>
+          </a:stretch>
+        </p:blipFill>
+        <p:spPr>
+          <a:xfrm>
+            <a:off x="3803650" y="948871"/>
+            <a:ext cx="4584700" cy="3543300"/>
+          </a:xfrm>
+          <a:prstGeom prst="rect">
+            <a:avLst/>
+          </a:prstGeom>
+        </p:spPr>
+      </p:pic>
     </p:spTree>
     <p:extLst>
       <p:ext uri="{BB962C8B-B14F-4D97-AF65-F5344CB8AC3E}">
@@ -3942,6 +4002,36 @@
           </a:p>
         </p:txBody>
       </p:sp>
+      <p:pic>
+        <p:nvPicPr>
+          <p:cNvPr id="4" name="図 3">
+            <a:extLst>
+              <a:ext uri="{FF2B5EF4-FFF2-40B4-BE49-F238E27FC236}">
+                <a16:creationId xmlns:a16="http://schemas.microsoft.com/office/drawing/2014/main" id="{AF3F7AC0-D4BB-26DF-C868-7775D2B782B6}"/>
+              </a:ext>
+            </a:extLst>
+          </p:cNvPr>
+          <p:cNvPicPr>
+            <a:picLocks noChangeAspect="1"/>
+          </p:cNvPicPr>
+          <p:nvPr/>
+        </p:nvPicPr>
+        <p:blipFill>
+          <a:blip r:embed="rId2"/>
+          <a:stretch>
+            <a:fillRect/>
+          </a:stretch>
+        </p:blipFill>
+        <p:spPr>
+          <a:xfrm>
+            <a:off x="3746500" y="908050"/>
+            <a:ext cx="4699000" cy="5041900"/>
+          </a:xfrm>
+          <a:prstGeom prst="rect">
+            <a:avLst/>
+          </a:prstGeom>
+        </p:spPr>
+      </p:pic>
     </p:spTree>
     <p:extLst>
       <p:ext uri="{BB962C8B-B14F-4D97-AF65-F5344CB8AC3E}">
